--- a/docs/團隊介紹視頻_3分鐘_可編輯.pptx
+++ b/docs/團隊介紹視頻_3分鐘_可編輯.pptx
@@ -6,6 +6,7 @@
   </p:sldMasterIdLst>
   <p:sldIdLst>
     <p:sldId id="256" r:id="rId7"/>
+    <p:sldId id="263" r:id="rId14"/>
     <p:sldId id="257" r:id="rId8"/>
     <p:sldId id="258" r:id="rId9"/>
     <p:sldId id="259" r:id="rId10"/>
@@ -3202,11 +3203,15 @@
           </a:bodyPr>
           <a:lstStyle/>
           <a:p>
-            <a:pPr algn="l"/>
-            <a:r>
-              <a:rPr xmlns:ns0="http://schemas.openxmlformats.org/officeDocument/2006/main" sz="1400" b="0" ns0:eastAsia="Microsoft YaHei">
-                <a:solidFill>
-                  <a:srgbClr val="5A6B7D"/>
+            <a:pPr algn="l">
+              <a:spcAft>
+                <a:spcPts val="0"/>
+              </a:spcAft>
+            </a:pPr>
+            <a:r>
+              <a:rPr sz="1400">
+                <a:solidFill>
+                  <a:srgbClr val="706860"/>
                 </a:solidFill>
                 <a:latin typeface="Microsoft YaHei"/>
               </a:rPr>
@@ -3362,12 +3367,13 @@
           </a:bodyPr>
           <a:lstStyle/>
           <a:p>
-            <a:pPr algn="l"/>
-            <a:r>
-              <a:rPr xmlns:ns4="http://schemas.openxmlformats.org/officeDocument/2006/main" sz="1600" b="0" ns4:eastAsia="Microsoft YaHei">
-                <a:solidFill>
-                  <a:srgbClr val="2A2826"/>
-                </a:solidFill>
+            <a:pPr algn="l">
+              <a:spcAft>
+                <a:spcPts val="0"/>
+              </a:spcAft>
+            </a:pPr>
+            <a:r>
+              <a:rPr sz="1600">
                 <a:latin typeface="Microsoft YaHei"/>
               </a:rPr>
               <a:t>●  隊伍：愛拼才會贏</a:t>
@@ -3397,15 +3403,16 @@
           </a:bodyPr>
           <a:lstStyle/>
           <a:p>
-            <a:pPr algn="l"/>
-            <a:r>
-              <a:rPr xmlns:ns5="http://schemas.openxmlformats.org/officeDocument/2006/main" sz="1600" b="0" ns5:eastAsia="Microsoft YaHei">
-                <a:solidFill>
-                  <a:srgbClr val="2A2826"/>
-                </a:solidFill>
-                <a:latin typeface="Microsoft YaHei"/>
-              </a:rPr>
-              <a:t>●  參賽者：施天益（SITINIEK）</a:t>
+            <a:pPr algn="l">
+              <a:spcAft>
+                <a:spcPts val="0"/>
+              </a:spcAft>
+            </a:pPr>
+            <a:r>
+              <a:rPr sz="1600">
+                <a:latin typeface="Microsoft YaHei"/>
+              </a:rPr>
+              <a:t>●  成員：施天益（SI TIN IEK）</a:t>
             </a:r>
           </a:p>
         </p:txBody>
@@ -3432,15 +3439,16 @@
           </a:bodyPr>
           <a:lstStyle/>
           <a:p>
-            <a:pPr algn="l"/>
-            <a:r>
-              <a:rPr xmlns:ns6="http://schemas.openxmlformats.org/officeDocument/2006/main" sz="1600" b="0" ns6:eastAsia="Microsoft YaHei">
-                <a:solidFill>
-                  <a:srgbClr val="2A2826"/>
-                </a:solidFill>
-                <a:latin typeface="Microsoft YaHei"/>
-              </a:rPr>
-              <a:t>●  學號：dc227126</a:t>
+            <a:pPr algn="l">
+              <a:spcAft>
+                <a:spcPts val="0"/>
+              </a:spcAft>
+            </a:pPr>
+            <a:r>
+              <a:rPr sz="1600">
+                <a:latin typeface="Microsoft YaHei"/>
+              </a:rPr>
+              <a:t>●  一人團隊：產品 · Agent · 全端 · 測試</a:t>
             </a:r>
           </a:p>
         </p:txBody>
@@ -3491,15 +3499,19 @@
           </a:bodyPr>
           <a:lstStyle/>
           <a:p>
-            <a:pPr algn="l"/>
-            <a:r>
-              <a:rPr xmlns:ns7="http://schemas.openxmlformats.org/officeDocument/2006/main" sz="1200" b="0" ns7:eastAsia="Microsoft YaHei">
-                <a:solidFill>
-                  <a:srgbClr val="B83A2F"/>
-                </a:solidFill>
-                <a:latin typeface="Microsoft YaHei"/>
-              </a:rPr>
-              <a:t>01 / 07</a:t>
+            <a:pPr algn="l">
+              <a:spcAft>
+                <a:spcPts val="0"/>
+              </a:spcAft>
+            </a:pPr>
+            <a:r>
+              <a:rPr sz="1200">
+                <a:solidFill>
+                  <a:srgbClr val="C64331"/>
+                </a:solidFill>
+                <a:latin typeface="Microsoft YaHei"/>
+              </a:rPr>
+              <a:t>01 / 08</a:t>
             </a:r>
           </a:p>
         </p:txBody>
@@ -3535,6 +3547,41 @@
                 <a:latin typeface="Microsoft YaHei"/>
               </a:rPr>
               <a:t>街知巷聞 · EveryLane Macau</a:t>
+            </a:r>
+          </a:p>
+        </p:txBody>
+      </p:sp>
+      <p:sp>
+        <p:nvSpPr>
+          <p:cNvPr id="14" name="TextBox 13"/>
+          <p:cNvSpPr txBox="1"/>
+          <p:nvPr/>
+        </p:nvSpPr>
+        <p:spPr>
+          <a:xfrm>
+            <a:off x="502920" y="4892040"/>
+            <a:ext cx="5669280" cy="502920"/>
+          </a:xfrm>
+          <a:prstGeom prst="rect">
+            <a:avLst/>
+          </a:prstGeom>
+          <a:noFill/>
+        </p:spPr>
+        <p:txBody>
+          <a:bodyPr wrap="square">
+            <a:spAutoFit/>
+          </a:bodyPr>
+          <a:lstStyle/>
+          <a:p>
+            <a:r>
+              <a:rPr sz="1500" b="1">
+                <a:solidFill>
+                  <a:srgbClr val="C45A3A"/>
+                </a:solidFill>
+                <a:latin typeface="Microsoft YaHei"/>
+                <a:hlinkClick r:id="rId3"/>
+              </a:rPr>
+              <a:t>線上演示：http://47.79.228.128/</a:t>
             </a:r>
           </a:p>
         </p:txBody>
@@ -3572,10 +3619,12 @@
             <a:avLst/>
           </a:prstGeom>
           <a:solidFill>
-            <a:srgbClr val="FBF6EC"/>
+            <a:srgbClr val="F8F3E9"/>
           </a:solidFill>
           <a:ln>
-            <a:noFill/>
+            <a:solidFill>
+              <a:srgbClr val="F8F3E9"/>
+            </a:solidFill>
           </a:ln>
         </p:spPr>
         <p:style>
@@ -3615,10 +3664,12 @@
             <a:avLst/>
           </a:prstGeom>
           <a:solidFill>
-            <a:srgbClr val="B83A2F"/>
+            <a:srgbClr val="C64331"/>
           </a:solidFill>
           <a:ln>
-            <a:noFill/>
+            <a:solidFill>
+              <a:srgbClr val="C64331"/>
+            </a:solidFill>
           </a:ln>
         </p:spPr>
         <p:style>
@@ -3660,20 +3711,27 @@
           <a:noFill/>
         </p:spPr>
         <p:txBody>
-          <a:bodyPr wrap="square">
+          <a:bodyPr wrap="square" lIns="0" rIns="0" tIns="0" bIns="0" anchor="t">
             <a:spAutoFit/>
           </a:bodyPr>
           <a:lstStyle/>
           <a:p>
-            <a:pPr algn="l"/>
-            <a:r>
-              <a:rPr xmlns:ns0="http://schemas.openxmlformats.org/officeDocument/2006/main" sz="1400" b="0" ns0:eastAsia="Microsoft YaHei">
-                <a:solidFill>
-                  <a:srgbClr val="5A6B7D"/>
-                </a:solidFill>
-                <a:latin typeface="Microsoft YaHei"/>
-              </a:rPr>
-              <a:t>01 · 為什麼做</a:t>
+            <a:pPr algn="l">
+              <a:lnSpc>
+                <a:spcPct val="105000"/>
+              </a:lnSpc>
+              <a:spcAft>
+                <a:spcPts val="0"/>
+              </a:spcAft>
+            </a:pPr>
+            <a:r>
+              <a:rPr sz="1400">
+                <a:solidFill>
+                  <a:srgbClr val="706860"/>
+                </a:solidFill>
+                <a:latin typeface="Microsoft YaHei"/>
+              </a:rPr>
+              <a:t>01 · 團隊成員</a:t>
             </a:r>
           </a:p>
         </p:txBody>
@@ -3695,74 +3753,35 @@
           <a:noFill/>
         </p:spPr>
         <p:txBody>
-          <a:bodyPr wrap="square">
+          <a:bodyPr wrap="square" lIns="0" rIns="0" tIns="0" bIns="0" anchor="t">
             <a:spAutoFit/>
           </a:bodyPr>
           <a:lstStyle/>
           <a:p>
-            <a:pPr algn="l"/>
-            <a:r>
-              <a:rPr xmlns:ns1="http://schemas.openxmlformats.org/officeDocument/2006/main" sz="3400" b="1" ns1:eastAsia="Microsoft YaHei">
-                <a:solidFill>
-                  <a:srgbClr val="2A2826"/>
-                </a:solidFill>
-                <a:latin typeface="Microsoft YaHei"/>
-              </a:rPr>
-              <a:t>同一座城市，</a:t>
-            </a:r>
-          </a:p>
-          <a:p>
-            <a:pPr algn="l"/>
-            <a:r>
-              <a:rPr xmlns:ns2="http://schemas.openxmlformats.org/officeDocument/2006/main" sz="3400" b="1" ns2:eastAsia="Microsoft YaHei">
-                <a:solidFill>
-                  <a:srgbClr val="2A2826"/>
-                </a:solidFill>
-                <a:latin typeface="Microsoft YaHei"/>
-              </a:rPr>
-              <a:t>兩種完全不同的人流</a:t>
-            </a:r>
-          </a:p>
-        </p:txBody>
-      </p:sp>
-      <p:sp>
-        <p:nvSpPr>
-          <p:cNvPr id="6" name="TextBox 5"/>
-          <p:cNvSpPr txBox="1"/>
-          <p:nvPr/>
-        </p:nvSpPr>
-        <p:spPr>
-          <a:xfrm>
-            <a:off x="502920" y="2606040"/>
-            <a:ext cx="5669280" cy="822960"/>
-          </a:xfrm>
-          <a:prstGeom prst="rect">
-            <a:avLst/>
-          </a:prstGeom>
-          <a:noFill/>
-        </p:spPr>
-        <p:txBody>
-          <a:bodyPr wrap="square">
-            <a:spAutoFit/>
-          </a:bodyPr>
-          <a:lstStyle/>
-          <a:p>
-            <a:pPr algn="l"/>
-            <a:r>
-              <a:rPr xmlns:ns3="http://schemas.openxmlformats.org/officeDocument/2006/main" sz="1600" b="0" ns3:eastAsia="Microsoft YaHei">
-                <a:solidFill>
-                  <a:srgbClr val="C45A3A"/>
-                </a:solidFill>
-                <a:latin typeface="Microsoft YaHei"/>
-              </a:rPr>
-              <a:t>熱點過度集中，幾分鐘外的老街與街坊小店卻未得到同樣客流</a:t>
-            </a:r>
-          </a:p>
-        </p:txBody>
-      </p:sp>
-      <p:sp>
-        <p:nvSpPr>
-          <p:cNvPr id="7" name="Rectangle 6"/>
+            <a:pPr algn="l">
+              <a:lnSpc>
+                <a:spcPct val="105000"/>
+              </a:lnSpc>
+              <a:spcAft>
+                <a:spcPts val="0"/>
+              </a:spcAft>
+            </a:pPr>
+            <a:r>
+              <a:rPr sz="3400" b="1">
+                <a:solidFill>
+                  <a:srgbClr val="2B2520"/>
+                </a:solidFill>
+                <a:latin typeface="Microsoft YaHei"/>
+              </a:rPr>
+              <a:t>一人團隊，
+全鏈路完成</a:t>
+            </a:r>
+          </a:p>
+        </p:txBody>
+      </p:sp>
+      <p:sp>
+        <p:nvSpPr>
+          <p:cNvPr id="6" name="Rectangle 5"/>
           <p:cNvSpPr/>
           <p:nvPr/>
         </p:nvSpPr>
@@ -3775,10 +3794,12 @@
             <a:avLst/>
           </a:prstGeom>
           <a:solidFill>
-            <a:srgbClr val="B0843C"/>
+            <a:srgbClr val="B77B2A"/>
           </a:solidFill>
           <a:ln>
-            <a:noFill/>
+            <a:solidFill>
+              <a:srgbClr val="B77B2A"/>
+            </a:solidFill>
           </a:ln>
         </p:spPr>
         <p:style>
@@ -3805,6 +3826,48 @@
       </p:sp>
       <p:sp>
         <p:nvSpPr>
+          <p:cNvPr id="7" name="TextBox 6"/>
+          <p:cNvSpPr txBox="1"/>
+          <p:nvPr/>
+        </p:nvSpPr>
+        <p:spPr>
+          <a:xfrm>
+            <a:off x="502920" y="2606040"/>
+            <a:ext cx="5669280" cy="822960"/>
+          </a:xfrm>
+          <a:prstGeom prst="rect">
+            <a:avLst/>
+          </a:prstGeom>
+          <a:noFill/>
+        </p:spPr>
+        <p:txBody>
+          <a:bodyPr wrap="square" lIns="0" rIns="0" tIns="0" bIns="0" anchor="t">
+            <a:spAutoFit/>
+          </a:bodyPr>
+          <a:lstStyle/>
+          <a:p>
+            <a:pPr algn="l">
+              <a:lnSpc>
+                <a:spcPct val="105000"/>
+              </a:lnSpc>
+              <a:spcAft>
+                <a:spcPts val="0"/>
+              </a:spcAft>
+            </a:pPr>
+            <a:r>
+              <a:rPr sz="1600" b="0">
+                <a:solidFill>
+                  <a:srgbClr val="C64331"/>
+                </a:solidFill>
+                <a:latin typeface="Microsoft YaHei"/>
+              </a:rPr>
+              <a:t>施天益 · SI TIN IEK｜把 AI、工程能力與澳門在地觀察，做成可用產品</a:t>
+            </a:r>
+          </a:p>
+        </p:txBody>
+      </p:sp>
+      <p:sp>
+        <p:nvSpPr>
           <p:cNvPr id="8" name="TextBox 7"/>
           <p:cNvSpPr txBox="1"/>
           <p:nvPr/>
@@ -3820,20 +3883,27 @@
           <a:noFill/>
         </p:spPr>
         <p:txBody>
-          <a:bodyPr wrap="square">
+          <a:bodyPr wrap="square" lIns="0" rIns="0" tIns="0" bIns="0" anchor="t">
             <a:spAutoFit/>
           </a:bodyPr>
           <a:lstStyle/>
           <a:p>
-            <a:pPr algn="l"/>
-            <a:r>
-              <a:rPr xmlns:ns4="http://schemas.openxmlformats.org/officeDocument/2006/main" sz="1600" b="0" ns4:eastAsia="Microsoft YaHei">
-                <a:solidFill>
-                  <a:srgbClr val="2A2826"/>
-                </a:solidFill>
-                <a:latin typeface="Microsoft YaHei"/>
-              </a:rPr>
-              <a:t>●  遊客：排隊、同質化、查資料費時</a:t>
+            <a:pPr algn="l">
+              <a:lnSpc>
+                <a:spcPct val="105000"/>
+              </a:lnSpc>
+              <a:spcAft>
+                <a:spcPts val="0"/>
+              </a:spcAft>
+            </a:pPr>
+            <a:r>
+              <a:rPr sz="1600" b="0">
+                <a:solidFill>
+                  <a:srgbClr val="2B2520"/>
+                </a:solidFill>
+                <a:latin typeface="Microsoft YaHei"/>
+              </a:rPr>
+              <a:t>●  澳門大學計算機相關專業學生</a:t>
             </a:r>
           </a:p>
         </p:txBody>
@@ -3855,20 +3925,27 @@
           <a:noFill/>
         </p:spPr>
         <p:txBody>
-          <a:bodyPr wrap="square">
+          <a:bodyPr wrap="square" lIns="0" rIns="0" tIns="0" bIns="0" anchor="t">
             <a:spAutoFit/>
           </a:bodyPr>
           <a:lstStyle/>
           <a:p>
-            <a:pPr algn="l"/>
-            <a:r>
-              <a:rPr xmlns:ns5="http://schemas.openxmlformats.org/officeDocument/2006/main" sz="1600" b="0" ns5:eastAsia="Microsoft YaHei">
-                <a:solidFill>
-                  <a:srgbClr val="2A2826"/>
-                </a:solidFill>
-                <a:latin typeface="Microsoft YaHei"/>
-              </a:rPr>
-              <a:t>●  小店：有文化但缺新客流</a:t>
+            <a:pPr algn="l">
+              <a:lnSpc>
+                <a:spcPct val="105000"/>
+              </a:lnSpc>
+              <a:spcAft>
+                <a:spcPts val="0"/>
+              </a:spcAft>
+            </a:pPr>
+            <a:r>
+              <a:rPr sz="1600" b="0">
+                <a:solidFill>
+                  <a:srgbClr val="2B2520"/>
+                </a:solidFill>
+                <a:latin typeface="Microsoft YaHei"/>
+              </a:rPr>
+              <a:t>●  AI / 全端開發 / 資料工程 / Web 安全</a:t>
             </a:r>
           </a:p>
         </p:txBody>
@@ -3881,7 +3958,7 @@
         </p:nvSpPr>
         <p:spPr>
           <a:xfrm>
-            <a:off x="502920" y="4443983"/>
+            <a:off x="502920" y="4443984"/>
             <a:ext cx="5669280" cy="365760"/>
           </a:xfrm>
           <a:prstGeom prst="rect">
@@ -3890,27 +3967,211 @@
           <a:noFill/>
         </p:spPr>
         <p:txBody>
-          <a:bodyPr wrap="square">
+          <a:bodyPr wrap="square" lIns="0" rIns="0" tIns="0" bIns="0" anchor="t">
             <a:spAutoFit/>
           </a:bodyPr>
           <a:lstStyle/>
           <a:p>
-            <a:pPr algn="l"/>
-            <a:r>
-              <a:rPr xmlns:ns6="http://schemas.openxmlformats.org/officeDocument/2006/main" sz="1600" b="0" ns6:eastAsia="Microsoft YaHei">
-                <a:solidFill>
-                  <a:srgbClr val="2A2826"/>
-                </a:solidFill>
-                <a:latin typeface="Microsoft YaHei"/>
-              </a:rPr>
-              <a:t>●  城市：旅遊承載失衡</a:t>
-            </a:r>
+            <a:pPr algn="l">
+              <a:lnSpc>
+                <a:spcPct val="105000"/>
+              </a:lnSpc>
+              <a:spcAft>
+                <a:spcPts val="0"/>
+              </a:spcAft>
+            </a:pPr>
+            <a:r>
+              <a:rPr sz="1600" b="0">
+                <a:solidFill>
+                  <a:srgbClr val="2B2520"/>
+                </a:solidFill>
+                <a:latin typeface="Microsoft YaHei"/>
+              </a:rPr>
+              <a:t>●  AIA 實習經驗 · NewStar CTF 2025 二等獎</a:t>
+            </a:r>
+          </a:p>
+        </p:txBody>
+      </p:sp>
+      <p:sp>
+        <p:nvSpPr>
+          <p:cNvPr id="11" name="TextBox 10"/>
+          <p:cNvSpPr txBox="1"/>
+          <p:nvPr/>
+        </p:nvSpPr>
+        <p:spPr>
+          <a:xfrm>
+            <a:off x="502920" y="5010912"/>
+            <a:ext cx="5623560" cy="566928"/>
+          </a:xfrm>
+          <a:prstGeom prst="rect">
+            <a:avLst/>
+          </a:prstGeom>
+          <a:noFill/>
+        </p:spPr>
+        <p:txBody>
+          <a:bodyPr wrap="square" lIns="0" rIns="0" tIns="0" bIns="0" anchor="t">
+            <a:spAutoFit/>
+          </a:bodyPr>
+          <a:lstStyle/>
+          <a:p>
+            <a:pPr algn="l">
+              <a:lnSpc>
+                <a:spcPct val="105000"/>
+              </a:lnSpc>
+              <a:spcAft>
+                <a:spcPts val="0"/>
+              </a:spcAft>
+            </a:pPr>
+            <a:r>
+              <a:rPr sz="1300" b="0">
+                <a:solidFill>
+                  <a:srgbClr val="706860"/>
+                </a:solidFill>
+                <a:latin typeface="Microsoft YaHei"/>
+              </a:rPr>
+              <a:t>本項目角色：產品策劃 · QwenPaw Agent · Skill / MCP · 前後端 · 測試</a:t>
+            </a:r>
+          </a:p>
+        </p:txBody>
+      </p:sp>
+      <p:sp>
+        <p:nvSpPr>
+          <p:cNvPr id="12" name="Rectangle 11"/>
+          <p:cNvSpPr/>
+          <p:nvPr/>
+        </p:nvSpPr>
+        <p:spPr>
+          <a:xfrm rot="21420000">
+            <a:off x="6967728" y="475488"/>
+            <a:ext cx="4251960" cy="4645152"/>
+          </a:xfrm>
+          <a:prstGeom prst="rect">
+            <a:avLst/>
+          </a:prstGeom>
+          <a:solidFill>
+            <a:srgbClr val="EDDBBB"/>
+          </a:solidFill>
+          <a:ln>
+            <a:solidFill>
+              <a:srgbClr val="EDDBBB"/>
+            </a:solidFill>
+          </a:ln>
+        </p:spPr>
+        <p:style>
+          <a:lnRef idx="1">
+            <a:schemeClr val="accent1"/>
+          </a:lnRef>
+          <a:fillRef idx="3">
+            <a:schemeClr val="accent1"/>
+          </a:fillRef>
+          <a:effectRef idx="2">
+            <a:schemeClr val="accent1"/>
+          </a:effectRef>
+          <a:fontRef idx="minor">
+            <a:schemeClr val="lt1"/>
+          </a:fontRef>
+        </p:style>
+        <p:txBody>
+          <a:bodyPr rtlCol="0" anchor="ctr"/>
+          <a:lstStyle/>
+          <a:p>
+            <a:pPr algn="ctr"/>
+          </a:p>
+        </p:txBody>
+      </p:sp>
+      <p:sp>
+        <p:nvSpPr>
+          <p:cNvPr id="13" name="Rounded Rectangle 12"/>
+          <p:cNvSpPr/>
+          <p:nvPr/>
+        </p:nvSpPr>
+        <p:spPr>
+          <a:xfrm>
+            <a:off x="6473952" y="621792"/>
+            <a:ext cx="4800600" cy="5029200"/>
+          </a:xfrm>
+          <a:prstGeom prst="roundRect">
+            <a:avLst/>
+          </a:prstGeom>
+          <a:solidFill>
+            <a:srgbClr val="FFFFFF"/>
+          </a:solidFill>
+          <a:ln>
+            <a:solidFill>
+              <a:srgbClr val="DDD0BE"/>
+            </a:solidFill>
+          </a:ln>
+        </p:spPr>
+        <p:style>
+          <a:lnRef idx="1">
+            <a:schemeClr val="accent1"/>
+          </a:lnRef>
+          <a:fillRef idx="3">
+            <a:schemeClr val="accent1"/>
+          </a:fillRef>
+          <a:effectRef idx="2">
+            <a:schemeClr val="accent1"/>
+          </a:effectRef>
+          <a:fontRef idx="minor">
+            <a:schemeClr val="lt1"/>
+          </a:fontRef>
+        </p:style>
+        <p:txBody>
+          <a:bodyPr rtlCol="0" anchor="ctr"/>
+          <a:lstStyle/>
+          <a:p>
+            <a:pPr algn="ctr"/>
+          </a:p>
+        </p:txBody>
+      </p:sp>
+      <p:sp>
+        <p:nvSpPr>
+          <p:cNvPr id="14" name="Rounded Rectangle 13"/>
+          <p:cNvSpPr/>
+          <p:nvPr/>
+        </p:nvSpPr>
+        <p:spPr>
+          <a:xfrm>
+            <a:off x="7680960" y="877824"/>
+            <a:ext cx="2395728" cy="2834640"/>
+          </a:xfrm>
+          <a:prstGeom prst="roundRect">
+            <a:avLst/>
+          </a:prstGeom>
+          <a:solidFill>
+            <a:srgbClr val="F8F3E9"/>
+          </a:solidFill>
+          <a:ln>
+            <a:solidFill>
+              <a:srgbClr val="E0D3C2"/>
+            </a:solidFill>
+          </a:ln>
+        </p:spPr>
+        <p:style>
+          <a:lnRef idx="1">
+            <a:schemeClr val="accent1"/>
+          </a:lnRef>
+          <a:fillRef idx="3">
+            <a:schemeClr val="accent1"/>
+          </a:fillRef>
+          <a:effectRef idx="2">
+            <a:schemeClr val="accent1"/>
+          </a:effectRef>
+          <a:fontRef idx="minor">
+            <a:schemeClr val="lt1"/>
+          </a:fontRef>
+        </p:style>
+        <p:txBody>
+          <a:bodyPr rtlCol="0" anchor="ctr"/>
+          <a:lstStyle/>
+          <a:p>
+            <a:pPr algn="ctr"/>
           </a:p>
         </p:txBody>
       </p:sp>
       <p:pic>
         <p:nvPicPr>
-          <p:cNvPr id="11" name="Picture 10" descr="02_why.png"/>
+          <p:cNvPr id="15" name="Picture 14" descr="_team_profile_si_tin_iek.png"/>
           <p:cNvPicPr>
             <a:picLocks noChangeAspect="1"/>
           </p:cNvPicPr>
@@ -3924,8 +4185,8 @@
         </p:blipFill>
         <p:spPr>
           <a:xfrm>
-            <a:off x="6492240" y="640080"/>
-            <a:ext cx="5212080" cy="4832032"/>
+            <a:off x="7763256" y="932688"/>
+            <a:ext cx="2231136" cy="2724912"/>
           </a:xfrm>
           <a:prstGeom prst="rect">
             <a:avLst/>
@@ -3934,7 +4195,253 @@
       </p:pic>
       <p:sp>
         <p:nvSpPr>
-          <p:cNvPr id="12" name="TextBox 11"/>
+          <p:cNvPr id="16" name="TextBox 15"/>
+          <p:cNvSpPr txBox="1"/>
+          <p:nvPr/>
+        </p:nvSpPr>
+        <p:spPr>
+          <a:xfrm>
+            <a:off x="6812280" y="3886200"/>
+            <a:ext cx="4114800" cy="402336"/>
+          </a:xfrm>
+          <a:prstGeom prst="rect">
+            <a:avLst/>
+          </a:prstGeom>
+          <a:noFill/>
+        </p:spPr>
+        <p:txBody>
+          <a:bodyPr wrap="square" lIns="0" rIns="0" tIns="0" bIns="0" anchor="ctr">
+            <a:spAutoFit/>
+          </a:bodyPr>
+          <a:lstStyle/>
+          <a:p>
+            <a:pPr algn="ctr">
+              <a:lnSpc>
+                <a:spcPct val="105000"/>
+              </a:lnSpc>
+              <a:spcAft>
+                <a:spcPts val="0"/>
+              </a:spcAft>
+            </a:pPr>
+            <a:r>
+              <a:rPr sz="2200" b="1">
+                <a:solidFill>
+                  <a:srgbClr val="2B2520"/>
+                </a:solidFill>
+                <a:latin typeface="Microsoft YaHei"/>
+              </a:rPr>
+              <a:t>施天益</a:t>
+            </a:r>
+          </a:p>
+        </p:txBody>
+      </p:sp>
+      <p:sp>
+        <p:nvSpPr>
+          <p:cNvPr id="17" name="TextBox 16"/>
+          <p:cNvSpPr txBox="1"/>
+          <p:nvPr/>
+        </p:nvSpPr>
+        <p:spPr>
+          <a:xfrm>
+            <a:off x="6812280" y="4279392"/>
+            <a:ext cx="4114800" cy="292608"/>
+          </a:xfrm>
+          <a:prstGeom prst="rect">
+            <a:avLst/>
+          </a:prstGeom>
+          <a:noFill/>
+        </p:spPr>
+        <p:txBody>
+          <a:bodyPr wrap="square" lIns="0" rIns="0" tIns="0" bIns="0" anchor="t">
+            <a:spAutoFit/>
+          </a:bodyPr>
+          <a:lstStyle/>
+          <a:p>
+            <a:pPr algn="ctr">
+              <a:lnSpc>
+                <a:spcPct val="105000"/>
+              </a:lnSpc>
+              <a:spcAft>
+                <a:spcPts val="0"/>
+              </a:spcAft>
+            </a:pPr>
+            <a:r>
+              <a:rPr sz="1200" b="0">
+                <a:solidFill>
+                  <a:srgbClr val="706860"/>
+                </a:solidFill>
+                <a:latin typeface="Microsoft YaHei"/>
+              </a:rPr>
+              <a:t>SI TIN IEK · 隊長 / 唯一成員</a:t>
+            </a:r>
+          </a:p>
+        </p:txBody>
+      </p:sp>
+      <p:sp>
+        <p:nvSpPr>
+          <p:cNvPr id="18" name="Rounded Rectangle 17"/>
+          <p:cNvSpPr/>
+          <p:nvPr/>
+        </p:nvSpPr>
+        <p:spPr>
+          <a:xfrm>
+            <a:off x="6903720" y="4791456"/>
+            <a:ext cx="960120" cy="420624"/>
+          </a:xfrm>
+          <a:prstGeom prst="roundRect">
+            <a:avLst/>
+          </a:prstGeom>
+          <a:solidFill>
+            <a:srgbClr val="F8F3E9"/>
+          </a:solidFill>
+          <a:ln>
+            <a:solidFill>
+              <a:srgbClr val="EDDBBB"/>
+            </a:solidFill>
+          </a:ln>
+        </p:spPr>
+        <p:style>
+          <a:lnRef idx="1">
+            <a:schemeClr val="accent1"/>
+          </a:lnRef>
+          <a:fillRef idx="3">
+            <a:schemeClr val="accent1"/>
+          </a:fillRef>
+          <a:effectRef idx="2">
+            <a:schemeClr val="accent1"/>
+          </a:effectRef>
+          <a:fontRef idx="minor">
+            <a:schemeClr val="lt1"/>
+          </a:fontRef>
+        </p:style>
+        <p:txBody>
+          <a:bodyPr rtlCol="0" anchor="ctr"/>
+          <a:lstStyle/>
+          <a:p>
+            <a:pPr algn="ctr"/>
+            <a:r>
+              <a:rPr sz="1100" b="1">
+                <a:solidFill>
+                  <a:srgbClr val="C64331"/>
+                </a:solidFill>
+                <a:latin typeface="Microsoft YaHei"/>
+              </a:rPr>
+              <a:t>產品</a:t>
+            </a:r>
+          </a:p>
+        </p:txBody>
+      </p:sp>
+      <p:sp>
+        <p:nvSpPr>
+          <p:cNvPr id="19" name="Rounded Rectangle 18"/>
+          <p:cNvSpPr/>
+          <p:nvPr/>
+        </p:nvSpPr>
+        <p:spPr>
+          <a:xfrm>
+            <a:off x="8010144" y="4791456"/>
+            <a:ext cx="1298448" cy="420624"/>
+          </a:xfrm>
+          <a:prstGeom prst="roundRect">
+            <a:avLst/>
+          </a:prstGeom>
+          <a:solidFill>
+            <a:srgbClr val="F8F3E9"/>
+          </a:solidFill>
+          <a:ln>
+            <a:solidFill>
+              <a:srgbClr val="EDDBBB"/>
+            </a:solidFill>
+          </a:ln>
+        </p:spPr>
+        <p:style>
+          <a:lnRef idx="1">
+            <a:schemeClr val="accent1"/>
+          </a:lnRef>
+          <a:fillRef idx="3">
+            <a:schemeClr val="accent1"/>
+          </a:fillRef>
+          <a:effectRef idx="2">
+            <a:schemeClr val="accent1"/>
+          </a:effectRef>
+          <a:fontRef idx="minor">
+            <a:schemeClr val="lt1"/>
+          </a:fontRef>
+        </p:style>
+        <p:txBody>
+          <a:bodyPr rtlCol="0" anchor="ctr"/>
+          <a:lstStyle/>
+          <a:p>
+            <a:pPr algn="ctr"/>
+            <a:r>
+              <a:rPr sz="1100" b="1">
+                <a:solidFill>
+                  <a:srgbClr val="C64331"/>
+                </a:solidFill>
+                <a:latin typeface="Microsoft YaHei"/>
+              </a:rPr>
+              <a:t>AI Agent</a:t>
+            </a:r>
+          </a:p>
+        </p:txBody>
+      </p:sp>
+      <p:sp>
+        <p:nvSpPr>
+          <p:cNvPr id="20" name="Rounded Rectangle 19"/>
+          <p:cNvSpPr/>
+          <p:nvPr/>
+        </p:nvSpPr>
+        <p:spPr>
+          <a:xfrm>
+            <a:off x="9491472" y="4791456"/>
+            <a:ext cx="960120" cy="420624"/>
+          </a:xfrm>
+          <a:prstGeom prst="roundRect">
+            <a:avLst/>
+          </a:prstGeom>
+          <a:solidFill>
+            <a:srgbClr val="F8F3E9"/>
+          </a:solidFill>
+          <a:ln>
+            <a:solidFill>
+              <a:srgbClr val="EDDBBB"/>
+            </a:solidFill>
+          </a:ln>
+        </p:spPr>
+        <p:style>
+          <a:lnRef idx="1">
+            <a:schemeClr val="accent1"/>
+          </a:lnRef>
+          <a:fillRef idx="3">
+            <a:schemeClr val="accent1"/>
+          </a:fillRef>
+          <a:effectRef idx="2">
+            <a:schemeClr val="accent1"/>
+          </a:effectRef>
+          <a:fontRef idx="minor">
+            <a:schemeClr val="lt1"/>
+          </a:fontRef>
+        </p:style>
+        <p:txBody>
+          <a:bodyPr rtlCol="0" anchor="ctr"/>
+          <a:lstStyle/>
+          <a:p>
+            <a:pPr algn="ctr"/>
+            <a:r>
+              <a:rPr sz="1100" b="1">
+                <a:solidFill>
+                  <a:srgbClr val="C64331"/>
+                </a:solidFill>
+                <a:latin typeface="Microsoft YaHei"/>
+              </a:rPr>
+              <a:t>全端</a:t>
+            </a:r>
+          </a:p>
+        </p:txBody>
+      </p:sp>
+      <p:sp>
+        <p:nvSpPr>
+          <p:cNvPr id="21" name="TextBox 20"/>
           <p:cNvSpPr txBox="1"/>
           <p:nvPr/>
         </p:nvSpPr>
@@ -3949,27 +4456,34 @@
           <a:noFill/>
         </p:spPr>
         <p:txBody>
-          <a:bodyPr wrap="square">
+          <a:bodyPr wrap="square" lIns="0" rIns="0" tIns="0" bIns="0" anchor="t">
             <a:spAutoFit/>
           </a:bodyPr>
           <a:lstStyle/>
           <a:p>
-            <a:pPr algn="l"/>
-            <a:r>
-              <a:rPr xmlns:ns7="http://schemas.openxmlformats.org/officeDocument/2006/main" sz="1200" b="0" ns7:eastAsia="Microsoft YaHei">
-                <a:solidFill>
-                  <a:srgbClr val="B83A2F"/>
-                </a:solidFill>
-                <a:latin typeface="Microsoft YaHei"/>
-              </a:rPr>
-              <a:t>02 / 07</a:t>
-            </a:r>
-          </a:p>
-        </p:txBody>
-      </p:sp>
-      <p:sp>
-        <p:nvSpPr>
-          <p:cNvPr id="13" name="TextBox 12"/>
+            <a:pPr algn="l">
+              <a:lnSpc>
+                <a:spcPct val="105000"/>
+              </a:lnSpc>
+              <a:spcAft>
+                <a:spcPts val="0"/>
+              </a:spcAft>
+            </a:pPr>
+            <a:r>
+              <a:rPr sz="1200">
+                <a:solidFill>
+                  <a:srgbClr val="C64331"/>
+                </a:solidFill>
+                <a:latin typeface="Microsoft YaHei"/>
+              </a:rPr>
+              <a:t>02 / 08</a:t>
+            </a:r>
+          </a:p>
+        </p:txBody>
+      </p:sp>
+      <p:sp>
+        <p:nvSpPr>
+          <p:cNvPr id="22" name="TextBox 21"/>
           <p:cNvSpPr txBox="1"/>
           <p:nvPr/>
         </p:nvSpPr>
@@ -3984,16 +4498,23 @@
           <a:noFill/>
         </p:spPr>
         <p:txBody>
-          <a:bodyPr wrap="square">
+          <a:bodyPr wrap="square" lIns="0" rIns="0" tIns="0" bIns="0" anchor="t">
             <a:spAutoFit/>
           </a:bodyPr>
           <a:lstStyle/>
           <a:p>
-            <a:pPr algn="r"/>
-            <a:r>
-              <a:rPr xmlns:ns8="http://schemas.openxmlformats.org/officeDocument/2006/main" sz="1200" b="0" ns8:eastAsia="Microsoft YaHei">
-                <a:solidFill>
-                  <a:srgbClr val="2A2826"/>
+            <a:pPr algn="r">
+              <a:lnSpc>
+                <a:spcPct val="105000"/>
+              </a:lnSpc>
+              <a:spcAft>
+                <a:spcPts val="0"/>
+              </a:spcAft>
+            </a:pPr>
+            <a:r>
+              <a:rPr sz="1200" b="0">
+                <a:solidFill>
+                  <a:srgbClr val="706860"/>
                 </a:solidFill>
                 <a:latin typeface="Microsoft YaHei"/>
               </a:rPr>
@@ -4128,15 +4649,19 @@
           </a:bodyPr>
           <a:lstStyle/>
           <a:p>
-            <a:pPr algn="l"/>
-            <a:r>
-              <a:rPr xmlns:ns0="http://schemas.openxmlformats.org/officeDocument/2006/main" sz="1400" b="0" ns0:eastAsia="Microsoft YaHei">
-                <a:solidFill>
-                  <a:srgbClr val="5A6B7D"/>
-                </a:solidFill>
-                <a:latin typeface="Microsoft YaHei"/>
-              </a:rPr>
-              <a:t>02 · QwenPaw 實際部署</a:t>
+            <a:pPr algn="l">
+              <a:spcAft>
+                <a:spcPts val="0"/>
+              </a:spcAft>
+            </a:pPr>
+            <a:r>
+              <a:rPr sz="1400">
+                <a:solidFill>
+                  <a:srgbClr val="706860"/>
+                </a:solidFill>
+                <a:latin typeface="Microsoft YaHei"/>
+              </a:rPr>
+              <a:t>02 · 為什麼做</a:t>
             </a:r>
           </a:p>
         </p:txBody>
@@ -4171,7 +4696,7 @@
                 </a:solidFill>
                 <a:latin typeface="Microsoft YaHei"/>
               </a:rPr>
-              <a:t>不是「對標」，</a:t>
+              <a:t>同一座城市，</a:t>
             </a:r>
           </a:p>
           <a:p>
@@ -4183,7 +4708,7 @@
                 </a:solidFill>
                 <a:latin typeface="Microsoft YaHei"/>
               </a:rPr>
-              <a:t>而是真正接入</a:t>
+              <a:t>兩種完全不同的人流</a:t>
             </a:r>
           </a:p>
         </p:txBody>
@@ -4218,7 +4743,7 @@
                 </a:solidFill>
                 <a:latin typeface="Microsoft YaHei"/>
               </a:rPr>
-              <a:t>QwenPaw 2.0 + EveryLane Skill + stdio MCP</a:t>
+              <a:t>熱點過度集中，幾分鐘外的老街與街坊小店卻未得到同樣客流</a:t>
             </a:r>
           </a:p>
         </p:txBody>
@@ -4296,7 +4821,7 @@
                 </a:solidFill>
                 <a:latin typeface="Microsoft YaHei"/>
               </a:rPr>
-              <a:t>●  專用 Skill：阿濠人設與工作流</a:t>
+              <a:t>●  遊客：排隊、同質化、查資料費時</a:t>
             </a:r>
           </a:p>
         </p:txBody>
@@ -4331,7 +4856,7 @@
                 </a:solidFill>
                 <a:latin typeface="Microsoft YaHei"/>
               </a:rPr>
-              <a:t>●  MCP：7 個旅遊工具 + 1 個完整流程工具</a:t>
+              <a:t>●  小店：有文化但缺新客流</a:t>
             </a:r>
           </a:p>
         </p:txBody>
@@ -4366,14 +4891,14 @@
                 </a:solidFill>
                 <a:latin typeface="Microsoft YaHei"/>
               </a:rPr>
-              <a:t>●  Token Plan 就緒：qwen3.7-plus</a:t>
+              <a:t>●  城市：旅遊承載失衡</a:t>
             </a:r>
           </a:p>
         </p:txBody>
       </p:sp>
       <p:pic>
         <p:nvPicPr>
-          <p:cNvPr id="11" name="Picture 10" descr="03_qwenpaw.png"/>
+          <p:cNvPr id="11" name="Picture 10" descr="02_why.png"/>
           <p:cNvPicPr>
             <a:picLocks noChangeAspect="1"/>
           </p:cNvPicPr>
@@ -4417,15 +4942,19 @@
           </a:bodyPr>
           <a:lstStyle/>
           <a:p>
-            <a:pPr algn="l"/>
-            <a:r>
-              <a:rPr xmlns:ns7="http://schemas.openxmlformats.org/officeDocument/2006/main" sz="1200" b="0" ns7:eastAsia="Microsoft YaHei">
-                <a:solidFill>
-                  <a:srgbClr val="B83A2F"/>
-                </a:solidFill>
-                <a:latin typeface="Microsoft YaHei"/>
-              </a:rPr>
-              <a:t>03 / 07</a:t>
+            <a:pPr algn="l">
+              <a:spcAft>
+                <a:spcPts val="0"/>
+              </a:spcAft>
+            </a:pPr>
+            <a:r>
+              <a:rPr sz="1200">
+                <a:solidFill>
+                  <a:srgbClr val="C64331"/>
+                </a:solidFill>
+                <a:latin typeface="Microsoft YaHei"/>
+              </a:rPr>
+              <a:t>03 / 08</a:t>
             </a:r>
           </a:p>
         </p:txBody>
@@ -4591,15 +5120,19 @@
           </a:bodyPr>
           <a:lstStyle/>
           <a:p>
-            <a:pPr algn="l"/>
-            <a:r>
-              <a:rPr xmlns:ns0="http://schemas.openxmlformats.org/officeDocument/2006/main" sz="1400" b="0" ns0:eastAsia="Microsoft YaHei">
-                <a:solidFill>
-                  <a:srgbClr val="5A6B7D"/>
-                </a:solidFill>
-                <a:latin typeface="Microsoft YaHei"/>
-              </a:rPr>
-              <a:t>03 · 最能證明智能體能力的場景</a:t>
+            <a:pPr algn="l">
+              <a:spcAft>
+                <a:spcPts val="0"/>
+              </a:spcAft>
+            </a:pPr>
+            <a:r>
+              <a:rPr sz="1400">
+                <a:solidFill>
+                  <a:srgbClr val="706860"/>
+                </a:solidFill>
+                <a:latin typeface="Microsoft YaHei"/>
+              </a:rPr>
+              <a:t>03 · QwenPaw 實際部署</a:t>
             </a:r>
           </a:p>
         </p:txBody>
@@ -4634,7 +5167,7 @@
                 </a:solidFill>
                 <a:latin typeface="Microsoft YaHei"/>
               </a:rPr>
-              <a:t>景點休息，</a:t>
+              <a:t>不是「對標」，</a:t>
             </a:r>
           </a:p>
           <a:p>
@@ -4646,7 +5179,7 @@
                 </a:solidFill>
                 <a:latin typeface="Microsoft YaHei"/>
               </a:rPr>
-              <a:t>智能體不會卡住</a:t>
+              <a:t>而是真正接入</a:t>
             </a:r>
           </a:p>
         </p:txBody>
@@ -4681,7 +5214,7 @@
                 </a:solidFill>
                 <a:latin typeface="Microsoft YaHei"/>
               </a:rPr>
-              <a:t>鄭家大屋（星期三）→ 核實休息 → 同區自動改線</a:t>
+              <a:t>QwenPaw 2.0 + EveryLane Skill + stdio MCP</a:t>
             </a:r>
           </a:p>
         </p:txBody>
@@ -4759,7 +5292,7 @@
                 </a:solidFill>
                 <a:latin typeface="Microsoft YaHei"/>
               </a:rPr>
-              <a:t>●  check_opening：發現週三休息</a:t>
+              <a:t>●  專用 Skill：阿濠人設與工作流</a:t>
             </a:r>
           </a:p>
         </p:txBody>
@@ -4794,7 +5327,7 @@
                 </a:solidFill>
                 <a:latin typeface="Microsoft YaHei"/>
               </a:rPr>
-              <a:t>●  Recovery：改往戀愛巷等同區景點</a:t>
+              <a:t>●  MCP：7 個旅遊工具 + 1 個完整流程工具</a:t>
             </a:r>
           </a:p>
         </p:txBody>
@@ -4829,14 +5362,14 @@
                 </a:solidFill>
                 <a:latin typeface="Microsoft YaHei"/>
               </a:rPr>
-              <a:t>●  predict_crowd：熱門點錯峰與老街導流</a:t>
+              <a:t>●  Token Plan 就緒：qwen3.7-plus</a:t>
             </a:r>
           </a:p>
         </p:txBody>
       </p:sp>
       <p:pic>
         <p:nvPicPr>
-          <p:cNvPr id="11" name="Picture 10" descr="04_recover.png"/>
+          <p:cNvPr id="11" name="Picture 10" descr="03_qwenpaw.png"/>
           <p:cNvPicPr>
             <a:picLocks noChangeAspect="1"/>
           </p:cNvPicPr>
@@ -4880,15 +5413,19 @@
           </a:bodyPr>
           <a:lstStyle/>
           <a:p>
-            <a:pPr algn="l"/>
-            <a:r>
-              <a:rPr xmlns:ns7="http://schemas.openxmlformats.org/officeDocument/2006/main" sz="1200" b="0" ns7:eastAsia="Microsoft YaHei">
-                <a:solidFill>
-                  <a:srgbClr val="B83A2F"/>
-                </a:solidFill>
-                <a:latin typeface="Microsoft YaHei"/>
-              </a:rPr>
-              <a:t>04 / 07</a:t>
+            <a:pPr algn="l">
+              <a:spcAft>
+                <a:spcPts val="0"/>
+              </a:spcAft>
+            </a:pPr>
+            <a:r>
+              <a:rPr sz="1200">
+                <a:solidFill>
+                  <a:srgbClr val="C64331"/>
+                </a:solidFill>
+                <a:latin typeface="Microsoft YaHei"/>
+              </a:rPr>
+              <a:t>04 / 08</a:t>
             </a:r>
           </a:p>
         </p:txBody>
@@ -5054,15 +5591,19 @@
           </a:bodyPr>
           <a:lstStyle/>
           <a:p>
-            <a:pPr algn="l"/>
-            <a:r>
-              <a:rPr xmlns:ns0="http://schemas.openxmlformats.org/officeDocument/2006/main" sz="1400" b="0" ns0:eastAsia="Microsoft YaHei">
-                <a:solidFill>
-                  <a:srgbClr val="5A6B7D"/>
-                </a:solidFill>
-                <a:latin typeface="Microsoft YaHei"/>
-              </a:rPr>
-              <a:t>04 · 可驗證的產品輸出</a:t>
+            <a:pPr algn="l">
+              <a:spcAft>
+                <a:spcPts val="0"/>
+              </a:spcAft>
+            </a:pPr>
+            <a:r>
+              <a:rPr sz="1400">
+                <a:solidFill>
+                  <a:srgbClr val="706860"/>
+                </a:solidFill>
+                <a:latin typeface="Microsoft YaHei"/>
+              </a:rPr>
+              <a:t>04 · 場景設計與失敗恢復</a:t>
             </a:r>
           </a:p>
         </p:txBody>
@@ -5097,7 +5638,7 @@
                 </a:solidFill>
                 <a:latin typeface="Microsoft YaHei"/>
               </a:rPr>
-              <a:t>每個結論，</a:t>
+              <a:t>景點休息，</a:t>
             </a:r>
           </a:p>
           <a:p>
@@ -5109,7 +5650,7 @@
                 </a:solidFill>
                 <a:latin typeface="Microsoft YaHei"/>
               </a:rPr>
-              <a:t>都有數據可以核對</a:t>
+              <a:t>智能體不會卡住</a:t>
             </a:r>
           </a:p>
         </p:txBody>
@@ -5144,7 +5685,7 @@
                 </a:solidFill>
                 <a:latin typeface="Microsoft YaHei"/>
               </a:rPr>
-              <a:t>地圖 + 時間軸 + 人流 + 開放 + 距離 + 預算 + 任務核對</a:t>
+              <a:t>鄭家大屋（星期三）→ 核實休息 → 同區自動改線</a:t>
             </a:r>
           </a:p>
         </p:txBody>
@@ -5222,7 +5763,7 @@
                 </a:solidFill>
                 <a:latin typeface="Microsoft YaHei"/>
               </a:rPr>
-              <a:t>●  一至五日，每日一個可步行片區</a:t>
+              <a:t>●  check_opening：發現週三休息</a:t>
             </a:r>
           </a:p>
         </p:txBody>
@@ -5257,7 +5798,7 @@
                 </a:solidFill>
                 <a:latin typeface="Microsoft YaHei"/>
               </a:rPr>
-              <a:t>●  繁中 / 簡中 / 英 / 葡 / 日 五語言</a:t>
+              <a:t>●  Recovery：改往戀愛巷等同區景點</a:t>
             </a:r>
           </a:p>
         </p:txBody>
@@ -5292,14 +5833,14 @@
                 </a:solidFill>
                 <a:latin typeface="Microsoft YaHei"/>
               </a:rPr>
-              <a:t>●  PDF 只輸出 AI 行程結果</a:t>
+              <a:t>●  predict_crowd：熱門點錯峰與老街導流</a:t>
             </a:r>
           </a:p>
         </p:txBody>
       </p:sp>
       <p:pic>
         <p:nvPicPr>
-          <p:cNvPr id="11" name="Picture 10" descr="05_product.png"/>
+          <p:cNvPr id="11" name="Picture 10" descr="04_recover.png"/>
           <p:cNvPicPr>
             <a:picLocks noChangeAspect="1"/>
           </p:cNvPicPr>
@@ -5343,15 +5884,19 @@
           </a:bodyPr>
           <a:lstStyle/>
           <a:p>
-            <a:pPr algn="l"/>
-            <a:r>
-              <a:rPr xmlns:ns7="http://schemas.openxmlformats.org/officeDocument/2006/main" sz="1200" b="0" ns7:eastAsia="Microsoft YaHei">
-                <a:solidFill>
-                  <a:srgbClr val="B83A2F"/>
-                </a:solidFill>
-                <a:latin typeface="Microsoft YaHei"/>
-              </a:rPr>
-              <a:t>05 / 07</a:t>
+            <a:pPr algn="l">
+              <a:spcAft>
+                <a:spcPts val="0"/>
+              </a:spcAft>
+            </a:pPr>
+            <a:r>
+              <a:rPr sz="1200">
+                <a:solidFill>
+                  <a:srgbClr val="C64331"/>
+                </a:solidFill>
+                <a:latin typeface="Microsoft YaHei"/>
+              </a:rPr>
+              <a:t>05 / 08</a:t>
             </a:r>
           </a:p>
         </p:txBody>
@@ -5517,15 +6062,19 @@
           </a:bodyPr>
           <a:lstStyle/>
           <a:p>
-            <a:pPr algn="l"/>
-            <a:r>
-              <a:rPr xmlns:ns0="http://schemas.openxmlformats.org/officeDocument/2006/main" sz="1400" b="0" ns0:eastAsia="Microsoft YaHei">
-                <a:solidFill>
-                  <a:srgbClr val="5A6B7D"/>
-                </a:solidFill>
-                <a:latin typeface="Microsoft YaHei"/>
-              </a:rPr>
-              <a:t>05 · 商業與社會價值</a:t>
+            <a:pPr algn="l">
+              <a:spcAft>
+                <a:spcPts val="0"/>
+              </a:spcAft>
+            </a:pPr>
+            <a:r>
+              <a:rPr sz="1400">
+                <a:solidFill>
+                  <a:srgbClr val="706860"/>
+                </a:solidFill>
+                <a:latin typeface="Microsoft YaHei"/>
+              </a:rPr>
+              <a:t>05 · 可驗證的產品輸出</a:t>
             </a:r>
           </a:p>
         </p:txBody>
@@ -5560,7 +6109,7 @@
                 </a:solidFill>
                 <a:latin typeface="Microsoft YaHei"/>
               </a:rPr>
-              <a:t>一個導流引擎，</a:t>
+              <a:t>每個結論，</a:t>
             </a:r>
           </a:p>
           <a:p>
@@ -5572,7 +6121,7 @@
                 </a:solidFill>
                 <a:latin typeface="Microsoft YaHei"/>
               </a:rPr>
-              <a:t>三方共贏</a:t>
+              <a:t>都有數據可以核對</a:t>
             </a:r>
           </a:p>
         </p:txBody>
@@ -5607,7 +6156,7 @@
                 </a:solidFill>
                 <a:latin typeface="Microsoft YaHei"/>
               </a:rPr>
-              <a:t>把「推薦」升級為可歸因的舊區客流服務</a:t>
+              <a:t>地圖 + 時間軸 + 人流 + 開放 + 距離 + 預算 + 任務核對</a:t>
             </a:r>
           </a:p>
         </p:txBody>
@@ -5685,7 +6234,7 @@
                 </a:solidFill>
                 <a:latin typeface="Microsoft YaHei"/>
               </a:rPr>
-              <a:t>●  遊客：少排隊、少查資料、玩得更地道</a:t>
+              <a:t>●  一至五日，每日一個可步行片區</a:t>
             </a:r>
           </a:p>
         </p:txBody>
@@ -5720,7 +6269,7 @@
                 </a:solidFill>
                 <a:latin typeface="Microsoft YaHei"/>
               </a:rPr>
-              <a:t>●  小店：獲得新的可量化到訪</a:t>
+              <a:t>●  繁中 / 簡中 / 英 / 葡 / 日 五語言</a:t>
             </a:r>
           </a:p>
         </p:txBody>
@@ -5755,14 +6304,14 @@
                 </a:solidFill>
                 <a:latin typeface="Microsoft YaHei"/>
               </a:rPr>
-              <a:t>●  城市：平衡承載、活化舊區、保育文化</a:t>
+              <a:t>●  PDF 只輸出 AI 行程結果</a:t>
             </a:r>
           </a:p>
         </p:txBody>
       </p:sp>
       <p:pic>
         <p:nvPicPr>
-          <p:cNvPr id="11" name="Picture 10" descr="06_value.png"/>
+          <p:cNvPr id="11" name="Picture 10" descr="05_product.png"/>
           <p:cNvPicPr>
             <a:picLocks noChangeAspect="1"/>
           </p:cNvPicPr>
@@ -5806,15 +6355,19 @@
           </a:bodyPr>
           <a:lstStyle/>
           <a:p>
-            <a:pPr algn="l"/>
-            <a:r>
-              <a:rPr xmlns:ns7="http://schemas.openxmlformats.org/officeDocument/2006/main" sz="1200" b="0" ns7:eastAsia="Microsoft YaHei">
-                <a:solidFill>
-                  <a:srgbClr val="B83A2F"/>
-                </a:solidFill>
-                <a:latin typeface="Microsoft YaHei"/>
-              </a:rPr>
-              <a:t>06 / 07</a:t>
+            <a:pPr algn="l">
+              <a:spcAft>
+                <a:spcPts val="0"/>
+              </a:spcAft>
+            </a:pPr>
+            <a:r>
+              <a:rPr sz="1200">
+                <a:solidFill>
+                  <a:srgbClr val="C64331"/>
+                </a:solidFill>
+                <a:latin typeface="Microsoft YaHei"/>
+              </a:rPr>
+              <a:t>06 / 08</a:t>
             </a:r>
           </a:p>
         </p:txBody>
@@ -5850,6 +6403,41 @@
                 <a:latin typeface="Microsoft YaHei"/>
               </a:rPr>
               <a:t>街知巷聞 · EveryLane Macau</a:t>
+            </a:r>
+          </a:p>
+        </p:txBody>
+      </p:sp>
+      <p:sp>
+        <p:nvSpPr>
+          <p:cNvPr id="14" name="TextBox 13"/>
+          <p:cNvSpPr txBox="1"/>
+          <p:nvPr/>
+        </p:nvSpPr>
+        <p:spPr>
+          <a:xfrm>
+            <a:off x="502920" y="4983480"/>
+            <a:ext cx="5669280" cy="502920"/>
+          </a:xfrm>
+          <a:prstGeom prst="rect">
+            <a:avLst/>
+          </a:prstGeom>
+          <a:noFill/>
+        </p:spPr>
+        <p:txBody>
+          <a:bodyPr wrap="square">
+            <a:spAutoFit/>
+          </a:bodyPr>
+          <a:lstStyle/>
+          <a:p>
+            <a:r>
+              <a:rPr sz="1500" b="1">
+                <a:solidFill>
+                  <a:srgbClr val="C45A3A"/>
+                </a:solidFill>
+                <a:latin typeface="Microsoft YaHei"/>
+                <a:hlinkClick r:id="rId3"/>
+              </a:rPr>
+              <a:t>線上演示：http://47.79.228.128/</a:t>
             </a:r>
           </a:p>
         </p:txBody>
@@ -5980,15 +6568,19 @@
           </a:bodyPr>
           <a:lstStyle/>
           <a:p>
-            <a:pPr algn="l"/>
-            <a:r>
-              <a:rPr xmlns:ns0="http://schemas.openxmlformats.org/officeDocument/2006/main" sz="1400" b="0" ns0:eastAsia="Microsoft YaHei">
-                <a:solidFill>
-                  <a:srgbClr val="5A6B7D"/>
-                </a:solidFill>
-                <a:latin typeface="Microsoft YaHei"/>
-              </a:rPr>
-              <a:t>06 · 完成度</a:t>
+            <a:pPr algn="l">
+              <a:spcAft>
+                <a:spcPts val="0"/>
+              </a:spcAft>
+            </a:pPr>
+            <a:r>
+              <a:rPr sz="1400">
+                <a:solidFill>
+                  <a:srgbClr val="706860"/>
+                </a:solidFill>
+                <a:latin typeface="Microsoft YaHei"/>
+              </a:rPr>
+              <a:t>06 · 商業與社會價值</a:t>
             </a:r>
           </a:p>
         </p:txBody>
@@ -6023,7 +6615,7 @@
                 </a:solidFill>
                 <a:latin typeface="Microsoft YaHei"/>
               </a:rPr>
-              <a:t>五輪測試，</a:t>
+              <a:t>一個導流引擎，</a:t>
             </a:r>
           </a:p>
           <a:p>
@@ -6035,7 +6627,7 @@
                 </a:solidFill>
                 <a:latin typeface="Microsoft YaHei"/>
               </a:rPr>
-              <a:t>不是只測一次 Demo</a:t>
+              <a:t>三方共贏</a:t>
             </a:r>
           </a:p>
         </p:txBody>
@@ -6070,7 +6662,7 @@
                 </a:solidFill>
                 <a:latin typeface="Microsoft YaHei"/>
               </a:rPr>
-              <a:t>後端 · 瀏覽器 · API 安全 · MCP 協議 · 文檔一致性</a:t>
+              <a:t>把「推薦」升級為可歸因的舊區客流服務</a:t>
             </a:r>
           </a:p>
         </p:txBody>
@@ -6148,7 +6740,7 @@
                 </a:solidFill>
                 <a:latin typeface="Microsoft YaHei"/>
               </a:rPr>
-              <a:t>●  531 後端 PASS</a:t>
+              <a:t>●  遊客：少排隊、少查資料、玩得更地道</a:t>
             </a:r>
           </a:p>
         </p:txBody>
@@ -6183,7 +6775,7 @@
                 </a:solidFill>
                 <a:latin typeface="Microsoft YaHei"/>
               </a:rPr>
-              <a:t>●  99 瀏覽器 PASS · 64 API / 安全 PASS</a:t>
+              <a:t>●  小店：獲得新的可量化到訪</a:t>
             </a:r>
           </a:p>
         </p:txBody>
@@ -6218,14 +6810,14 @@
                 </a:solidFill>
                 <a:latin typeface="Microsoft YaHei"/>
               </a:rPr>
-              <a:t>●  70 / 70 POI 有圖片 · 8 MCP 工具通過</a:t>
+              <a:t>●  城市：平衡承載、活化舊區、保育文化</a:t>
             </a:r>
           </a:p>
         </p:txBody>
       </p:sp>
       <p:pic>
         <p:nvPicPr>
-          <p:cNvPr id="11" name="Picture 10" descr="07_done.png"/>
+          <p:cNvPr id="11" name="Picture 10" descr="06_value.png"/>
           <p:cNvPicPr>
             <a:picLocks noChangeAspect="1"/>
           </p:cNvPicPr>
@@ -6269,15 +6861,19 @@
           </a:bodyPr>
           <a:lstStyle/>
           <a:p>
-            <a:pPr algn="l"/>
-            <a:r>
-              <a:rPr xmlns:ns7="http://schemas.openxmlformats.org/officeDocument/2006/main" sz="1200" b="0" ns7:eastAsia="Microsoft YaHei">
-                <a:solidFill>
-                  <a:srgbClr val="B83A2F"/>
-                </a:solidFill>
-                <a:latin typeface="Microsoft YaHei"/>
-              </a:rPr>
-              <a:t>07 / 07</a:t>
+            <a:pPr algn="l">
+              <a:spcAft>
+                <a:spcPts val="0"/>
+              </a:spcAft>
+            </a:pPr>
+            <a:r>
+              <a:rPr sz="1200">
+                <a:solidFill>
+                  <a:srgbClr val="C64331"/>
+                </a:solidFill>
+                <a:latin typeface="Microsoft YaHei"/>
+              </a:rPr>
+              <a:t>07 / 08</a:t>
             </a:r>
           </a:p>
         </p:txBody>
@@ -6313,6 +6909,566 @@
                 <a:latin typeface="Microsoft YaHei"/>
               </a:rPr>
               <a:t>街知巷聞 · EveryLane Macau</a:t>
+            </a:r>
+          </a:p>
+        </p:txBody>
+      </p:sp>
+    </p:spTree>
+  </p:cSld>
+  <p:clrMapOvr>
+    <a:masterClrMapping/>
+  </p:clrMapOvr>
+</p:sld>
+</file>
+
+<file path=ppt/slides/slide8.xml><?xml version="1.0" encoding="utf-8"?>
+<p:sld xmlns:a="http://schemas.openxmlformats.org/drawingml/2006/main" xmlns:p="http://schemas.openxmlformats.org/presentationml/2006/main" xmlns:r="http://schemas.openxmlformats.org/officeDocument/2006/relationships">
+  <p:cSld>
+    <p:spTree>
+      <p:nvGrpSpPr>
+        <p:cNvPr id="1" name=""/>
+        <p:cNvGrpSpPr/>
+        <p:nvPr/>
+      </p:nvGrpSpPr>
+      <p:grpSpPr/>
+      <p:sp>
+        <p:nvSpPr>
+          <p:cNvPr id="2" name="Rectangle 1"/>
+          <p:cNvSpPr/>
+          <p:nvPr/>
+        </p:nvSpPr>
+        <p:spPr>
+          <a:xfrm>
+            <a:off x="0" y="0"/>
+            <a:ext cx="12191695" cy="6858000"/>
+          </a:xfrm>
+          <a:prstGeom prst="rect">
+            <a:avLst/>
+          </a:prstGeom>
+          <a:solidFill>
+            <a:srgbClr val="FBF6EC"/>
+          </a:solidFill>
+          <a:ln>
+            <a:noFill/>
+          </a:ln>
+        </p:spPr>
+        <p:style>
+          <a:lnRef idx="1">
+            <a:schemeClr val="accent1"/>
+          </a:lnRef>
+          <a:fillRef idx="3">
+            <a:schemeClr val="accent1"/>
+          </a:fillRef>
+          <a:effectRef idx="2">
+            <a:schemeClr val="accent1"/>
+          </a:effectRef>
+          <a:fontRef idx="minor">
+            <a:schemeClr val="lt1"/>
+          </a:fontRef>
+        </p:style>
+        <p:txBody>
+          <a:bodyPr rtlCol="0" anchor="ctr"/>
+          <a:lstStyle/>
+          <a:p>
+            <a:pPr algn="ctr"/>
+          </a:p>
+        </p:txBody>
+      </p:sp>
+      <p:sp>
+        <p:nvSpPr>
+          <p:cNvPr id="3" name="Rectangle 2"/>
+          <p:cNvSpPr/>
+          <p:nvPr/>
+        </p:nvSpPr>
+        <p:spPr>
+          <a:xfrm>
+            <a:off x="0" y="0"/>
+            <a:ext cx="73152" cy="6858000"/>
+          </a:xfrm>
+          <a:prstGeom prst="rect">
+            <a:avLst/>
+          </a:prstGeom>
+          <a:solidFill>
+            <a:srgbClr val="B83A2F"/>
+          </a:solidFill>
+          <a:ln>
+            <a:noFill/>
+          </a:ln>
+        </p:spPr>
+        <p:style>
+          <a:lnRef idx="1">
+            <a:schemeClr val="accent1"/>
+          </a:lnRef>
+          <a:fillRef idx="3">
+            <a:schemeClr val="accent1"/>
+          </a:fillRef>
+          <a:effectRef idx="2">
+            <a:schemeClr val="accent1"/>
+          </a:effectRef>
+          <a:fontRef idx="minor">
+            <a:schemeClr val="lt1"/>
+          </a:fontRef>
+        </p:style>
+        <p:txBody>
+          <a:bodyPr rtlCol="0" anchor="ctr"/>
+          <a:lstStyle/>
+          <a:p>
+            <a:pPr algn="ctr"/>
+          </a:p>
+        </p:txBody>
+      </p:sp>
+      <p:sp>
+        <p:nvSpPr>
+          <p:cNvPr id="4" name="TextBox 3"/>
+          <p:cNvSpPr txBox="1"/>
+          <p:nvPr/>
+        </p:nvSpPr>
+        <p:spPr>
+          <a:xfrm>
+            <a:off x="502920" y="320040"/>
+            <a:ext cx="5669280" cy="365760"/>
+          </a:xfrm>
+          <a:prstGeom prst="rect">
+            <a:avLst/>
+          </a:prstGeom>
+          <a:noFill/>
+        </p:spPr>
+        <p:txBody>
+          <a:bodyPr wrap="square">
+            <a:spAutoFit/>
+          </a:bodyPr>
+          <a:lstStyle/>
+          <a:p>
+            <a:pPr algn="l">
+              <a:spcAft>
+                <a:spcPts val="0"/>
+              </a:spcAft>
+            </a:pPr>
+            <a:r>
+              <a:rPr sz="1400">
+                <a:solidFill>
+                  <a:srgbClr val="706860"/>
+                </a:solidFill>
+                <a:latin typeface="Microsoft YaHei"/>
+              </a:rPr>
+              <a:t>07 · 完成度</a:t>
+            </a:r>
+          </a:p>
+        </p:txBody>
+      </p:sp>
+      <p:sp>
+        <p:nvSpPr>
+          <p:cNvPr id="5" name="TextBox 4"/>
+          <p:cNvSpPr txBox="1"/>
+          <p:nvPr/>
+        </p:nvSpPr>
+        <p:spPr>
+          <a:xfrm>
+            <a:off x="502920" y="777240"/>
+            <a:ext cx="5760720" cy="1645920"/>
+          </a:xfrm>
+          <a:prstGeom prst="rect">
+            <a:avLst/>
+          </a:prstGeom>
+          <a:noFill/>
+        </p:spPr>
+        <p:txBody>
+          <a:bodyPr wrap="square">
+            <a:spAutoFit/>
+          </a:bodyPr>
+          <a:lstStyle/>
+          <a:p>
+            <a:pPr algn="l">
+              <a:spcAft>
+                <a:spcPts val="0"/>
+              </a:spcAft>
+            </a:pPr>
+            <a:r>
+              <a:rPr sz="3400" b="1">
+                <a:latin typeface="Microsoft YaHei"/>
+              </a:rPr>
+              <a:t>六輪測試，</a:t>
+            </a:r>
+            <a:br/>
+            <a:r>
+              <a:rPr sz="3400" b="1">
+                <a:latin typeface="Microsoft YaHei"/>
+              </a:rPr>
+              <a:t>不是只測一次 Demo</a:t>
+            </a:r>
+          </a:p>
+          <a:p>
+            <a:pPr algn="l">
+              <a:spcAft>
+                <a:spcPts val="0"/>
+              </a:spcAft>
+            </a:pPr>
+            <a:r>
+              <a:rPr xmlns:ns2="http://schemas.openxmlformats.org/officeDocument/2006/main" sz="3400" b="1" ns2:eastAsia="Microsoft YaHei">
+                <a:solidFill>
+                  <a:srgbClr val="2A2826"/>
+                </a:solidFill>
+                <a:latin typeface="Microsoft YaHei"/>
+              </a:rPr>
+              <a:t>不是只測一次 Demo</a:t>
+            </a:r>
+          </a:p>
+        </p:txBody>
+      </p:sp>
+      <p:sp>
+        <p:nvSpPr>
+          <p:cNvPr id="6" name="TextBox 5"/>
+          <p:cNvSpPr txBox="1"/>
+          <p:nvPr/>
+        </p:nvSpPr>
+        <p:spPr>
+          <a:xfrm>
+            <a:off x="502920" y="2606040"/>
+            <a:ext cx="5669280" cy="822960"/>
+          </a:xfrm>
+          <a:prstGeom prst="rect">
+            <a:avLst/>
+          </a:prstGeom>
+          <a:noFill/>
+        </p:spPr>
+        <p:txBody>
+          <a:bodyPr wrap="square">
+            <a:spAutoFit/>
+          </a:bodyPr>
+          <a:lstStyle/>
+          <a:p>
+            <a:pPr algn="l">
+              <a:spcAft>
+                <a:spcPts val="0"/>
+              </a:spcAft>
+            </a:pPr>
+            <a:r>
+              <a:rPr sz="1600">
+                <a:solidFill>
+                  <a:srgbClr val="C64331"/>
+                </a:solidFill>
+                <a:latin typeface="Microsoft YaHei"/>
+              </a:rPr>
+              <a:t>六輪回歸 · 公網實測 · API 安全 · MCP 協議 · 交付一致性</a:t>
+            </a:r>
+          </a:p>
+        </p:txBody>
+      </p:sp>
+      <p:sp>
+        <p:nvSpPr>
+          <p:cNvPr id="7" name="Rectangle 6"/>
+          <p:cNvSpPr/>
+          <p:nvPr/>
+        </p:nvSpPr>
+        <p:spPr>
+          <a:xfrm>
+            <a:off x="502920" y="2423160"/>
+            <a:ext cx="640080" cy="54864"/>
+          </a:xfrm>
+          <a:prstGeom prst="rect">
+            <a:avLst/>
+          </a:prstGeom>
+          <a:solidFill>
+            <a:srgbClr val="B0843C"/>
+          </a:solidFill>
+          <a:ln>
+            <a:noFill/>
+          </a:ln>
+        </p:spPr>
+        <p:style>
+          <a:lnRef idx="1">
+            <a:schemeClr val="accent1"/>
+          </a:lnRef>
+          <a:fillRef idx="3">
+            <a:schemeClr val="accent1"/>
+          </a:fillRef>
+          <a:effectRef idx="2">
+            <a:schemeClr val="accent1"/>
+          </a:effectRef>
+          <a:fontRef idx="minor">
+            <a:schemeClr val="lt1"/>
+          </a:fontRef>
+        </p:style>
+        <p:txBody>
+          <a:bodyPr rtlCol="0" anchor="ctr"/>
+          <a:lstStyle/>
+          <a:p>
+            <a:pPr algn="ctr"/>
+          </a:p>
+        </p:txBody>
+      </p:sp>
+      <p:sp>
+        <p:nvSpPr>
+          <p:cNvPr id="8" name="TextBox 7"/>
+          <p:cNvSpPr txBox="1"/>
+          <p:nvPr/>
+        </p:nvSpPr>
+        <p:spPr>
+          <a:xfrm>
+            <a:off x="502920" y="3566160"/>
+            <a:ext cx="5669280" cy="365760"/>
+          </a:xfrm>
+          <a:prstGeom prst="rect">
+            <a:avLst/>
+          </a:prstGeom>
+          <a:noFill/>
+        </p:spPr>
+        <p:txBody>
+          <a:bodyPr wrap="square">
+            <a:spAutoFit/>
+          </a:bodyPr>
+          <a:lstStyle/>
+          <a:p>
+            <a:pPr algn="l">
+              <a:spcAft>
+                <a:spcPts val="0"/>
+              </a:spcAft>
+            </a:pPr>
+            <a:r>
+              <a:rPr sz="1600">
+                <a:latin typeface="Microsoft YaHei"/>
+              </a:rPr>
+              <a:t>●  641 後端 PASS · 0 FAIL</a:t>
+            </a:r>
+          </a:p>
+        </p:txBody>
+      </p:sp>
+      <p:sp>
+        <p:nvSpPr>
+          <p:cNvPr id="9" name="TextBox 8"/>
+          <p:cNvSpPr txBox="1"/>
+          <p:nvPr/>
+        </p:nvSpPr>
+        <p:spPr>
+          <a:xfrm>
+            <a:off x="502920" y="4005072"/>
+            <a:ext cx="5669280" cy="365760"/>
+          </a:xfrm>
+          <a:prstGeom prst="rect">
+            <a:avLst/>
+          </a:prstGeom>
+          <a:noFill/>
+        </p:spPr>
+        <p:txBody>
+          <a:bodyPr wrap="square">
+            <a:spAutoFit/>
+          </a:bodyPr>
+          <a:lstStyle/>
+          <a:p>
+            <a:pPr algn="l">
+              <a:spcAft>
+                <a:spcPts val="0"/>
+              </a:spcAft>
+            </a:pPr>
+            <a:r>
+              <a:rPr sz="1600">
+                <a:latin typeface="Microsoft YaHei"/>
+              </a:rPr>
+              <a:t>●  99 瀏覽器 PASS · 64 API / 安全 PASS</a:t>
+            </a:r>
+          </a:p>
+        </p:txBody>
+      </p:sp>
+      <p:sp>
+        <p:nvSpPr>
+          <p:cNvPr id="10" name="TextBox 9"/>
+          <p:cNvSpPr txBox="1"/>
+          <p:nvPr/>
+        </p:nvSpPr>
+        <p:spPr>
+          <a:xfrm>
+            <a:off x="502920" y="4443983"/>
+            <a:ext cx="5669280" cy="365760"/>
+          </a:xfrm>
+          <a:prstGeom prst="rect">
+            <a:avLst/>
+          </a:prstGeom>
+          <a:noFill/>
+        </p:spPr>
+        <p:txBody>
+          <a:bodyPr wrap="square">
+            <a:spAutoFit/>
+          </a:bodyPr>
+          <a:lstStyle/>
+          <a:p>
+            <a:pPr algn="l">
+              <a:spcAft>
+                <a:spcPts val="0"/>
+              </a:spcAft>
+            </a:pPr>
+            <a:r>
+              <a:rPr sz="1600">
+                <a:latin typeface="Microsoft YaHei"/>
+              </a:rPr>
+              <a:t>●  70 / 70 POI 有圖片 · 8 MCP 工具通過</a:t>
+            </a:r>
+          </a:p>
+        </p:txBody>
+      </p:sp>
+      <p:pic>
+        <p:nvPicPr>
+          <p:cNvPr id="11" name="Picture 10" descr="07_done.png"/>
+          <p:cNvPicPr>
+            <a:picLocks noChangeAspect="1"/>
+          </p:cNvPicPr>
+          <p:nvPr/>
+        </p:nvPicPr>
+        <p:blipFill>
+          <a:blip r:embed="rId2"/>
+          <a:stretch>
+            <a:fillRect/>
+          </a:stretch>
+        </p:blipFill>
+        <p:spPr>
+          <a:xfrm>
+            <a:off x="6492240" y="640080"/>
+            <a:ext cx="5212080" cy="4832032"/>
+          </a:xfrm>
+          <a:prstGeom prst="rect">
+            <a:avLst/>
+          </a:prstGeom>
+        </p:spPr>
+      </p:pic>
+      <p:sp>
+        <p:nvSpPr>
+          <p:cNvPr id="12" name="TextBox 11"/>
+          <p:cNvSpPr txBox="1"/>
+          <p:nvPr/>
+        </p:nvSpPr>
+        <p:spPr>
+          <a:xfrm>
+            <a:off x="502920" y="6355080"/>
+            <a:ext cx="1828800" cy="320040"/>
+          </a:xfrm>
+          <a:prstGeom prst="rect">
+            <a:avLst/>
+          </a:prstGeom>
+          <a:noFill/>
+        </p:spPr>
+        <p:txBody>
+          <a:bodyPr wrap="square">
+            <a:spAutoFit/>
+          </a:bodyPr>
+          <a:lstStyle/>
+          <a:p>
+            <a:pPr algn="l">
+              <a:spcAft>
+                <a:spcPts val="0"/>
+              </a:spcAft>
+            </a:pPr>
+            <a:r>
+              <a:rPr sz="1200">
+                <a:solidFill>
+                  <a:srgbClr val="C64331"/>
+                </a:solidFill>
+                <a:latin typeface="Microsoft YaHei"/>
+              </a:rPr>
+              <a:t>08 / 08</a:t>
+            </a:r>
+          </a:p>
+        </p:txBody>
+      </p:sp>
+      <p:sp>
+        <p:nvSpPr>
+          <p:cNvPr id="13" name="TextBox 12"/>
+          <p:cNvSpPr txBox="1"/>
+          <p:nvPr/>
+        </p:nvSpPr>
+        <p:spPr>
+          <a:xfrm>
+            <a:off x="7772400" y="6355080"/>
+            <a:ext cx="3931920" cy="320040"/>
+          </a:xfrm>
+          <a:prstGeom prst="rect">
+            <a:avLst/>
+          </a:prstGeom>
+          <a:noFill/>
+        </p:spPr>
+        <p:txBody>
+          <a:bodyPr wrap="square">
+            <a:spAutoFit/>
+          </a:bodyPr>
+          <a:lstStyle/>
+          <a:p>
+            <a:pPr algn="r"/>
+            <a:r>
+              <a:rPr xmlns:ns8="http://schemas.openxmlformats.org/officeDocument/2006/main" sz="1200" b="0" ns8:eastAsia="Microsoft YaHei">
+                <a:solidFill>
+                  <a:srgbClr val="2A2826"/>
+                </a:solidFill>
+                <a:latin typeface="Microsoft YaHei"/>
+              </a:rPr>
+              <a:t>街知巷聞 · EveryLane Macau</a:t>
+            </a:r>
+          </a:p>
+        </p:txBody>
+      </p:sp>
+      <p:sp>
+        <p:nvSpPr>
+          <p:cNvPr id="14" name="TextBox 13"/>
+          <p:cNvSpPr txBox="1"/>
+          <p:nvPr/>
+        </p:nvSpPr>
+        <p:spPr>
+          <a:xfrm>
+            <a:off x="502920" y="4983480"/>
+            <a:ext cx="5669280" cy="502920"/>
+          </a:xfrm>
+          <a:prstGeom prst="rect">
+            <a:avLst/>
+          </a:prstGeom>
+          <a:noFill/>
+        </p:spPr>
+        <p:txBody>
+          <a:bodyPr wrap="square">
+            <a:spAutoFit/>
+          </a:bodyPr>
+          <a:lstStyle/>
+          <a:p>
+            <a:r>
+              <a:rPr sz="1500" b="1">
+                <a:solidFill>
+                  <a:srgbClr val="C45A3A"/>
+                </a:solidFill>
+                <a:latin typeface="Microsoft YaHei"/>
+                <a:hlinkClick r:id="rId3"/>
+              </a:rPr>
+              <a:t>線上演示：http://47.79.228.128/</a:t>
+            </a:r>
+          </a:p>
+        </p:txBody>
+      </p:sp>
+      <p:sp>
+        <p:nvSpPr>
+          <p:cNvPr id="15" name="TextBox 14"/>
+          <p:cNvSpPr txBox="1"/>
+          <p:nvPr/>
+        </p:nvSpPr>
+        <p:spPr>
+          <a:xfrm>
+            <a:off x="502920" y="5440680"/>
+            <a:ext cx="5669280" cy="365760"/>
+          </a:xfrm>
+          <a:prstGeom prst="rect">
+            <a:avLst/>
+          </a:prstGeom>
+          <a:noFill/>
+        </p:spPr>
+        <p:txBody>
+          <a:bodyPr wrap="none">
+            <a:spAutoFit/>
+          </a:bodyPr>
+          <a:lstStyle/>
+          <a:p>
+            <a:r>
+              <a:rPr sz="1200" b="0">
+                <a:solidFill>
+                  <a:srgbClr val="2A2826"/>
+                </a:solidFill>
+                <a:latin typeface="Microsoft YaHei"/>
+                <a:hlinkClick r:id="rId4"/>
+              </a:rPr>
+              <a:t>GitHub：https://github.com/Mikey-SI/everylane-macau</a:t>
             </a:r>
           </a:p>
         </p:txBody>
